--- a/Diagrams.pptx
+++ b/Diagrams.pptx
@@ -6,6 +6,7 @@
   </p:sldMasterIdLst>
   <p:sldIdLst>
     <p:sldId id="256" r:id="rId3"/>
+    <p:sldId id="257" r:id="rId4"/>
   </p:sldIdLst>
   <p:sldSz cx="10080625" cy="5670550"/>
   <p:notesSz cx="7772400" cy="10058400"/>
@@ -42,7 +43,7 @@
         <p:spPr>
           <a:xfrm>
             <a:off x="504000" y="226080"/>
-            <a:ext cx="9071280" cy="946080"/>
+            <a:ext cx="9070920" cy="945720"/>
           </a:xfrm>
           <a:prstGeom prst="rect">
             <a:avLst/>
@@ -143,7 +144,7 @@
         <p:txBody>
           <a:bodyPr/>
           <a:p>
-            <a:fld id="{7B764C83-69AA-4A2E-8785-C23D6F8D7CBC}" type="slidenum">
+            <a:fld id="{601D2B88-73A0-4B3B-82BD-8BAF86A8CBFE}" type="slidenum">
               <a:t>&lt;#&gt;</a:t>
             </a:fld>
           </a:p>
@@ -205,7 +206,7 @@
         <p:spPr>
           <a:xfrm>
             <a:off x="504000" y="226080"/>
-            <a:ext cx="9071280" cy="946080"/>
+            <a:ext cx="9070920" cy="945720"/>
           </a:xfrm>
           <a:prstGeom prst="rect">
             <a:avLst/>
@@ -254,7 +255,7 @@
         <p:spPr>
           <a:xfrm>
             <a:off x="3447360" y="5165280"/>
-            <a:ext cx="3194640" cy="390240"/>
+            <a:ext cx="3194280" cy="389880"/>
           </a:xfrm>
           <a:prstGeom prst="rect">
             <a:avLst/>
@@ -326,7 +327,7 @@
         <p:spPr>
           <a:xfrm>
             <a:off x="7227360" y="5165280"/>
-            <a:ext cx="2347920" cy="390240"/>
+            <a:ext cx="2347560" cy="389880"/>
           </a:xfrm>
           <a:prstGeom prst="rect">
             <a:avLst/>
@@ -367,7 +368,7 @@
                 <a:tab algn="l" pos="0"/>
               </a:tabLst>
             </a:pPr>
-            <a:fld id="{D934C98F-704A-4E0F-BAAA-4C680693DB39}" type="slidenum">
+            <a:fld id="{CE93B5D0-FE20-4F28-AEA3-86D6359C1A3F}" type="slidenum">
               <a:rPr b="0" lang="en-US" sz="1400" spc="-1" strike="noStrike">
                 <a:solidFill>
                   <a:srgbClr val="000000"/>
@@ -398,7 +399,7 @@
         <p:spPr>
           <a:xfrm>
             <a:off x="504000" y="5165280"/>
-            <a:ext cx="2347920" cy="390240"/>
+            <a:ext cx="2347560" cy="389880"/>
           </a:xfrm>
           <a:prstGeom prst="rect">
             <a:avLst/>
@@ -704,8 +705,8 @@
         </p:nvSpPr>
         <p:spPr>
           <a:xfrm>
-            <a:off x="1827000" y="2430000"/>
-            <a:ext cx="1599840" cy="914040"/>
+            <a:off x="1827000" y="2790000"/>
+            <a:ext cx="1599480" cy="913680"/>
           </a:xfrm>
           <a:prstGeom prst="roundRect">
             <a:avLst>
@@ -811,8 +812,8 @@
         </p:nvSpPr>
         <p:spPr>
           <a:xfrm>
-            <a:off x="4113000" y="770400"/>
-            <a:ext cx="1599840" cy="914040"/>
+            <a:off x="4113000" y="1130400"/>
+            <a:ext cx="1599480" cy="913680"/>
           </a:xfrm>
           <a:prstGeom prst="roundRect">
             <a:avLst>
@@ -928,8 +929,8 @@
         </p:nvSpPr>
         <p:spPr>
           <a:xfrm>
-            <a:off x="6627600" y="2442600"/>
-            <a:ext cx="1599840" cy="914040"/>
+            <a:off x="6627600" y="2802600"/>
+            <a:ext cx="1599480" cy="913680"/>
           </a:xfrm>
           <a:prstGeom prst="roundRect">
             <a:avLst>
@@ -1035,8 +1036,8 @@
         </p:nvSpPr>
         <p:spPr>
           <a:xfrm>
-            <a:off x="4113000" y="4030200"/>
-            <a:ext cx="1599840" cy="914040"/>
+            <a:off x="4113000" y="4390200"/>
+            <a:ext cx="1599480" cy="913680"/>
           </a:xfrm>
           <a:prstGeom prst="roundRect">
             <a:avLst>
@@ -1145,8 +1146,8 @@
         </p:nvCxnSpPr>
         <p:spPr>
           <a:xfrm flipH="1" flipV="1" rot="5400000">
-            <a:off x="2768400" y="1085400"/>
-            <a:ext cx="1203120" cy="1486440"/>
+            <a:off x="2768040" y="1445400"/>
+            <a:ext cx="1203120" cy="1486800"/>
           </a:xfrm>
           <a:prstGeom prst="curvedConnector2">
             <a:avLst/>
@@ -1172,8 +1173,8 @@
         </p:nvCxnSpPr>
         <p:spPr>
           <a:xfrm flipH="1" rot="16200000">
-            <a:off x="2798640" y="3172320"/>
-            <a:ext cx="1143360" cy="1486440"/>
+            <a:off x="2797920" y="3531960"/>
+            <a:ext cx="1143720" cy="1486800"/>
           </a:xfrm>
           <a:prstGeom prst="curvedConnector2">
             <a:avLst/>
@@ -1198,8 +1199,8 @@
         </p:nvCxnSpPr>
         <p:spPr>
           <a:xfrm flipV="1">
-            <a:off x="5712840" y="3356640"/>
-            <a:ext cx="1715040" cy="1130760"/>
+            <a:off x="5712480" y="3716280"/>
+            <a:ext cx="1715040" cy="1131120"/>
           </a:xfrm>
           <a:prstGeom prst="curvedConnector2">
             <a:avLst/>
@@ -1224,12 +1225,12 @@
         </p:nvCxnSpPr>
         <p:spPr>
           <a:xfrm rot="10800000">
-            <a:off x="3426480" y="2886480"/>
-            <a:ext cx="3201120" cy="12960"/>
+            <a:off x="3426480" y="3246480"/>
+            <a:ext cx="3201480" cy="12960"/>
           </a:xfrm>
           <a:prstGeom prst="curvedConnector3">
             <a:avLst>
-              <a:gd name="adj1" fmla="val 24991"/>
+              <a:gd name="adj1" fmla="val 25000"/>
             </a:avLst>
           </a:prstGeom>
           <a:ln w="36720">
@@ -1249,8 +1250,8 @@
         </p:nvSpPr>
         <p:spPr>
           <a:xfrm>
-            <a:off x="1935000" y="1130400"/>
-            <a:ext cx="1286640" cy="480240"/>
+            <a:off x="1935000" y="1490400"/>
+            <a:ext cx="1286280" cy="479880"/>
           </a:xfrm>
           <a:prstGeom prst="rect">
             <a:avLst/>
@@ -1307,8 +1308,8 @@
         </p:nvSpPr>
         <p:spPr>
           <a:xfrm>
-            <a:off x="2332800" y="4222800"/>
-            <a:ext cx="829440" cy="264240"/>
+            <a:off x="2332800" y="4582800"/>
+            <a:ext cx="829080" cy="263880"/>
           </a:xfrm>
           <a:prstGeom prst="rect">
             <a:avLst/>
@@ -1365,8 +1366,8 @@
         </p:nvSpPr>
         <p:spPr>
           <a:xfrm>
-            <a:off x="6957720" y="4019400"/>
-            <a:ext cx="1401120" cy="264240"/>
+            <a:off x="6957720" y="4379400"/>
+            <a:ext cx="1400760" cy="263880"/>
           </a:xfrm>
           <a:prstGeom prst="rect">
             <a:avLst/>
@@ -1436,8 +1437,8 @@
         </p:nvSpPr>
         <p:spPr>
           <a:xfrm>
-            <a:off x="3465000" y="2887200"/>
-            <a:ext cx="2285640" cy="264240"/>
+            <a:off x="3537000" y="2995200"/>
+            <a:ext cx="2285280" cy="263880"/>
           </a:xfrm>
           <a:prstGeom prst="rect">
             <a:avLst/>
@@ -1496,12 +1497,12 @@
         </p:nvCxnSpPr>
         <p:spPr>
           <a:xfrm rot="5400000">
-            <a:off x="3770640" y="1340640"/>
-            <a:ext cx="798840" cy="1486440"/>
+            <a:off x="3769920" y="1701000"/>
+            <a:ext cx="799560" cy="1486080"/>
           </a:xfrm>
           <a:prstGeom prst="curvedConnector3">
             <a:avLst>
-              <a:gd name="adj1" fmla="val 41929"/>
+              <a:gd name="adj1" fmla="val 41891"/>
             </a:avLst>
           </a:prstGeom>
           <a:ln w="36720">
@@ -1521,8 +1522,8 @@
         </p:nvSpPr>
         <p:spPr>
           <a:xfrm>
-            <a:off x="3619800" y="1843200"/>
-            <a:ext cx="1108440" cy="264240"/>
+            <a:off x="3619800" y="2203200"/>
+            <a:ext cx="1108080" cy="263880"/>
           </a:xfrm>
           <a:prstGeom prst="rect">
             <a:avLst/>
@@ -1581,8 +1582,8 @@
         </p:nvCxnSpPr>
         <p:spPr>
           <a:xfrm flipV="1">
-            <a:off x="1122120" y="2886840"/>
-            <a:ext cx="705240" cy="9000"/>
+            <a:off x="1122120" y="3246840"/>
+            <a:ext cx="705240" cy="9360"/>
           </a:xfrm>
           <a:prstGeom prst="curvedConnector3">
             <a:avLst>
@@ -1606,12 +1607,14 @@
           <p:nvPr/>
         </p:nvCxnSpPr>
         <p:spPr>
-          <a:xfrm rot="16200000">
-            <a:off x="4473720" y="2867760"/>
-            <a:ext cx="2177640" cy="360"/>
-          </a:xfrm>
-          <a:prstGeom prst="curvedConnector2">
-            <a:avLst/>
+          <a:xfrm rot="5400000">
+            <a:off x="4439160" y="3154680"/>
+            <a:ext cx="2160720" cy="17640"/>
+          </a:xfrm>
+          <a:prstGeom prst="curvedConnector3">
+            <a:avLst>
+              <a:gd name="adj1" fmla="val 25012"/>
+            </a:avLst>
           </a:prstGeom>
           <a:ln w="36720">
             <a:solidFill>
@@ -1631,8 +1634,8 @@
         </p:nvSpPr>
         <p:spPr>
           <a:xfrm>
-            <a:off x="5533200" y="1936800"/>
-            <a:ext cx="829440" cy="264240"/>
+            <a:off x="5533200" y="2296800"/>
+            <a:ext cx="829080" cy="263880"/>
           </a:xfrm>
           <a:prstGeom prst="rect">
             <a:avLst/>
@@ -1687,8 +1690,8 @@
         </p:nvSpPr>
         <p:spPr>
           <a:xfrm>
-            <a:off x="6544800" y="4428000"/>
-            <a:ext cx="2286000" cy="457200"/>
+            <a:off x="6544800" y="4788000"/>
+            <a:ext cx="2285640" cy="456840"/>
           </a:xfrm>
           <a:prstGeom prst="rect">
             <a:avLst/>
@@ -1738,7 +1741,1631 @@
               </a:rPr>
               <a:t>Always Run Spinner” option for immediate transition</a:t>
             </a:r>
-            <a:endParaRPr b="0" i="1" lang="en-US" sz="1300" spc="-1" strike="noStrike">
+            <a:endParaRPr b="0" lang="en-US" sz="1300" spc="-1" strike="noStrike">
+              <a:solidFill>
+                <a:srgbClr val="000000"/>
+              </a:solidFill>
+              <a:latin typeface="Arial"/>
+            </a:endParaRPr>
+          </a:p>
+        </p:txBody>
+      </p:sp>
+      <p:sp>
+        <p:nvSpPr>
+          <p:cNvPr id="25" name=""/>
+          <p:cNvSpPr txBox="1"/>
+          <p:nvPr/>
+        </p:nvSpPr>
+        <p:spPr>
+          <a:xfrm>
+            <a:off x="504360" y="71640"/>
+            <a:ext cx="9070920" cy="625320"/>
+          </a:xfrm>
+          <a:prstGeom prst="rect">
+            <a:avLst/>
+          </a:prstGeom>
+          <a:noFill/>
+          <a:ln w="0">
+            <a:noFill/>
+          </a:ln>
+        </p:spPr>
+        <p:txBody>
+          <a:bodyPr lIns="0" rIns="0" tIns="0" bIns="0" anchor="ctr">
+            <a:noAutofit/>
+          </a:bodyPr>
+          <a:p>
+            <a:pPr algn="ctr"/>
+            <a:r>
+              <a:rPr b="0" lang="en-US" sz="4400" spc="-1" strike="noStrike">
+                <a:solidFill>
+                  <a:srgbClr val="000000"/>
+                </a:solidFill>
+                <a:latin typeface="Arial"/>
+              </a:rPr>
+              <a:t>Idea 1</a:t>
+            </a:r>
+            <a:endParaRPr b="0" lang="en-US" sz="4400" spc="-1" strike="noStrike">
+              <a:solidFill>
+                <a:srgbClr val="000000"/>
+              </a:solidFill>
+              <a:latin typeface="Arial"/>
+            </a:endParaRPr>
+          </a:p>
+        </p:txBody>
+      </p:sp>
+      <p:sp>
+        <p:nvSpPr>
+          <p:cNvPr id="26" name=""/>
+          <p:cNvSpPr/>
+          <p:nvPr/>
+        </p:nvSpPr>
+        <p:spPr>
+          <a:xfrm>
+            <a:off x="4114800" y="3246840"/>
+            <a:ext cx="1371600" cy="456840"/>
+          </a:xfrm>
+          <a:prstGeom prst="rect">
+            <a:avLst/>
+          </a:prstGeom>
+          <a:noFill/>
+          <a:ln w="0">
+            <a:solidFill>
+              <a:srgbClr val="ffffff">
+                <a:alpha val="0"/>
+              </a:srgbClr>
+            </a:solidFill>
+          </a:ln>
+        </p:spPr>
+        <p:style>
+          <a:lnRef idx="0"/>
+          <a:fillRef idx="0"/>
+          <a:effectRef idx="0"/>
+          <a:fontRef idx="minor"/>
+        </p:style>
+        <p:txBody>
+          <a:bodyPr lIns="90000" rIns="90000" tIns="45000" bIns="45000" anchor="ctr">
+            <a:noAutofit/>
+          </a:bodyPr>
+          <a:p>
+            <a:pPr algn="ctr">
+              <a:lnSpc>
+                <a:spcPct val="100000"/>
+              </a:lnSpc>
+            </a:pPr>
+            <a:r>
+              <a:rPr b="0" i="1" lang="en-US" sz="1100" spc="-1" strike="noStrike">
+                <a:solidFill>
+                  <a:srgbClr val="000000"/>
+                </a:solidFill>
+                <a:latin typeface="Arial"/>
+                <a:ea typeface="DejaVu Sans"/>
+              </a:rPr>
+              <a:t>Bridge short gaps between balls</a:t>
+            </a:r>
+            <a:endParaRPr b="0" lang="en-US" sz="1100" spc="-1" strike="noStrike">
+              <a:solidFill>
+                <a:srgbClr val="000000"/>
+              </a:solidFill>
+              <a:latin typeface="Arial"/>
+            </a:endParaRPr>
+          </a:p>
+        </p:txBody>
+      </p:sp>
+    </p:spTree>
+  </p:cSld>
+  <mc:AlternateContent>
+    <mc:Choice Requires="p14">
+      <p:transition spd="slow" p14:dur="2000"/>
+    </mc:Choice>
+    <mc:Fallback>
+      <p:transition spd="slow"/>
+    </mc:Fallback>
+  </mc:AlternateContent>
+</p:sld>
+</file>
+
+<file path=ppt/slides/slide2.xml><?xml version="1.0" encoding="utf-8"?>
+<p:sld xmlns:a="http://schemas.openxmlformats.org/drawingml/2006/main" xmlns:p="http://schemas.openxmlformats.org/presentationml/2006/main" xmlns:r="http://schemas.openxmlformats.org/officeDocument/2006/relationships" xmlns:p14="http://schemas.microsoft.com/office/powerpoint/2010/main" xmlns:p15="http://schemas.microsoft.com/office/powerpoint/2012/main" xmlns:mc="http://schemas.openxmlformats.org/markup-compatibility/2006">
+  <p:cSld>
+    <p:spTree>
+      <p:nvGrpSpPr>
+        <p:cNvPr id="1" name=""/>
+        <p:cNvGrpSpPr/>
+        <p:nvPr/>
+      </p:nvGrpSpPr>
+      <p:grpSpPr>
+        <a:xfrm>
+          <a:off x="0" y="0"/>
+          <a:ext cx="0" cy="0"/>
+          <a:chOff x="0" y="0"/>
+          <a:chExt cx="0" cy="0"/>
+        </a:xfrm>
+      </p:grpSpPr>
+      <p:sp>
+        <p:nvSpPr>
+          <p:cNvPr id="27" name=""/>
+          <p:cNvSpPr/>
+          <p:nvPr/>
+        </p:nvSpPr>
+        <p:spPr>
+          <a:xfrm>
+            <a:off x="1539000" y="2790000"/>
+            <a:ext cx="1599480" cy="913680"/>
+          </a:xfrm>
+          <a:prstGeom prst="roundRect">
+            <a:avLst>
+              <a:gd name="adj" fmla="val 16667"/>
+            </a:avLst>
+          </a:prstGeom>
+          <a:solidFill>
+            <a:srgbClr val="dde8cb"/>
+          </a:solidFill>
+          <a:ln w="0">
+            <a:solidFill>
+              <a:srgbClr val="81d41a"/>
+            </a:solidFill>
+          </a:ln>
+        </p:spPr>
+        <p:style>
+          <a:lnRef idx="0"/>
+          <a:fillRef idx="0"/>
+          <a:effectRef idx="0"/>
+          <a:fontRef idx="minor"/>
+        </p:style>
+        <p:txBody>
+          <a:bodyPr lIns="90000" rIns="90000" tIns="45000" bIns="45000" anchor="ctr">
+            <a:noAutofit/>
+          </a:bodyPr>
+          <a:p>
+            <a:pPr algn="ctr">
+              <a:lnSpc>
+                <a:spcPct val="100000"/>
+              </a:lnSpc>
+            </a:pPr>
+            <a:r>
+              <a:rPr b="1" lang="en-US" sz="1800" spc="-1" strike="noStrike" u="sng">
+                <a:solidFill>
+                  <a:srgbClr val="000000"/>
+                </a:solidFill>
+                <a:uFillTx/>
+                <a:latin typeface="Arial"/>
+                <a:ea typeface="DejaVu Sans"/>
+              </a:rPr>
+              <a:t>Idle</a:t>
+            </a:r>
+            <a:endParaRPr b="0" lang="en-US" sz="1800" spc="-1" strike="noStrike">
+              <a:solidFill>
+                <a:srgbClr val="000000"/>
+              </a:solidFill>
+              <a:latin typeface="Arial"/>
+            </a:endParaRPr>
+          </a:p>
+          <a:p>
+            <a:pPr algn="ctr">
+              <a:lnSpc>
+                <a:spcPct val="100000"/>
+              </a:lnSpc>
+            </a:pPr>
+            <a:r>
+              <a:rPr b="0" lang="en-US" sz="1400" spc="-1" strike="noStrike">
+                <a:solidFill>
+                  <a:srgbClr val="000000"/>
+                </a:solidFill>
+                <a:latin typeface="Arial"/>
+                <a:ea typeface="DejaVu Sans"/>
+              </a:rPr>
+              <a:t>Intake closed,</a:t>
+            </a:r>
+            <a:endParaRPr b="0" lang="en-US" sz="1400" spc="-1" strike="noStrike">
+              <a:solidFill>
+                <a:srgbClr val="000000"/>
+              </a:solidFill>
+              <a:latin typeface="Arial"/>
+            </a:endParaRPr>
+          </a:p>
+          <a:p>
+            <a:pPr algn="ctr">
+              <a:lnSpc>
+                <a:spcPct val="100000"/>
+              </a:lnSpc>
+            </a:pPr>
+            <a:r>
+              <a:rPr b="0" lang="en-US" sz="1400" spc="-1" strike="noStrike">
+                <a:solidFill>
+                  <a:srgbClr val="000000"/>
+                </a:solidFill>
+                <a:latin typeface="Arial"/>
+                <a:ea typeface="DejaVu Sans"/>
+              </a:rPr>
+              <a:t>all off</a:t>
+            </a:r>
+            <a:endParaRPr b="0" lang="en-US" sz="1400" spc="-1" strike="noStrike">
+              <a:solidFill>
+                <a:srgbClr val="000000"/>
+              </a:solidFill>
+              <a:latin typeface="Arial"/>
+            </a:endParaRPr>
+          </a:p>
+        </p:txBody>
+      </p:sp>
+      <p:sp>
+        <p:nvSpPr>
+          <p:cNvPr id="28" name=""/>
+          <p:cNvSpPr/>
+          <p:nvPr/>
+        </p:nvSpPr>
+        <p:spPr>
+          <a:xfrm>
+            <a:off x="1557000" y="1130400"/>
+            <a:ext cx="1599480" cy="913680"/>
+          </a:xfrm>
+          <a:prstGeom prst="roundRect">
+            <a:avLst>
+              <a:gd name="adj" fmla="val 16667"/>
+            </a:avLst>
+          </a:prstGeom>
+          <a:solidFill>
+            <a:srgbClr val="dde8cb"/>
+          </a:solidFill>
+          <a:ln w="0">
+            <a:solidFill>
+              <a:srgbClr val="81d41a"/>
+            </a:solidFill>
+          </a:ln>
+        </p:spPr>
+        <p:style>
+          <a:lnRef idx="0"/>
+          <a:fillRef idx="0"/>
+          <a:effectRef idx="0"/>
+          <a:fontRef idx="minor"/>
+        </p:style>
+        <p:txBody>
+          <a:bodyPr lIns="90000" rIns="90000" tIns="45000" bIns="45000" anchor="ctr">
+            <a:noAutofit/>
+          </a:bodyPr>
+          <a:p>
+            <a:pPr algn="ctr">
+              <a:lnSpc>
+                <a:spcPct val="100000"/>
+              </a:lnSpc>
+            </a:pPr>
+            <a:r>
+              <a:rPr b="1" lang="en-US" sz="1800" spc="-1" strike="noStrike" u="sng">
+                <a:solidFill>
+                  <a:srgbClr val="000000"/>
+                </a:solidFill>
+                <a:uFillTx/>
+                <a:latin typeface="Arial"/>
+                <a:ea typeface="DejaVu Sans"/>
+              </a:rPr>
+              <a:t>Take In</a:t>
+            </a:r>
+            <a:endParaRPr b="0" lang="en-US" sz="1800" spc="-1" strike="noStrike">
+              <a:solidFill>
+                <a:srgbClr val="000000"/>
+              </a:solidFill>
+              <a:latin typeface="Arial"/>
+            </a:endParaRPr>
+          </a:p>
+          <a:p>
+            <a:pPr algn="ctr">
+              <a:lnSpc>
+                <a:spcPct val="100000"/>
+              </a:lnSpc>
+            </a:pPr>
+            <a:r>
+              <a:rPr b="0" lang="en-US" sz="1400" spc="-1" strike="noStrike">
+                <a:solidFill>
+                  <a:srgbClr val="000000"/>
+                </a:solidFill>
+                <a:latin typeface="Arial"/>
+                <a:ea typeface="DejaVu Sans"/>
+              </a:rPr>
+              <a:t>Intake open,</a:t>
+            </a:r>
+            <a:endParaRPr b="0" lang="en-US" sz="1400" spc="-1" strike="noStrike">
+              <a:solidFill>
+                <a:srgbClr val="000000"/>
+              </a:solidFill>
+              <a:latin typeface="Arial"/>
+            </a:endParaRPr>
+          </a:p>
+          <a:p>
+            <a:pPr algn="ctr">
+              <a:lnSpc>
+                <a:spcPct val="100000"/>
+              </a:lnSpc>
+            </a:pPr>
+            <a:r>
+              <a:rPr b="0" lang="en-US" sz="1400" spc="-1" strike="noStrike">
+                <a:solidFill>
+                  <a:srgbClr val="000000"/>
+                </a:solidFill>
+                <a:latin typeface="Arial"/>
+                <a:ea typeface="DejaVu Sans"/>
+              </a:rPr>
+              <a:t> </a:t>
+            </a:r>
+            <a:r>
+              <a:rPr b="0" lang="en-US" sz="1400" spc="-1" strike="noStrike">
+                <a:solidFill>
+                  <a:srgbClr val="000000"/>
+                </a:solidFill>
+                <a:latin typeface="Arial"/>
+                <a:ea typeface="DejaVu Sans"/>
+              </a:rPr>
+              <a:t>storage &amp; feeder on</a:t>
+            </a:r>
+            <a:endParaRPr b="0" lang="en-US" sz="1400" spc="-1" strike="noStrike">
+              <a:solidFill>
+                <a:srgbClr val="000000"/>
+              </a:solidFill>
+              <a:latin typeface="Arial"/>
+            </a:endParaRPr>
+          </a:p>
+        </p:txBody>
+      </p:sp>
+      <p:sp>
+        <p:nvSpPr>
+          <p:cNvPr id="29" name=""/>
+          <p:cNvSpPr/>
+          <p:nvPr/>
+        </p:nvSpPr>
+        <p:spPr>
+          <a:xfrm>
+            <a:off x="6339600" y="2802600"/>
+            <a:ext cx="1599480" cy="913680"/>
+          </a:xfrm>
+          <a:prstGeom prst="roundRect">
+            <a:avLst>
+              <a:gd name="adj" fmla="val 16667"/>
+            </a:avLst>
+          </a:prstGeom>
+          <a:solidFill>
+            <a:srgbClr val="dde8cb"/>
+          </a:solidFill>
+          <a:ln w="0">
+            <a:solidFill>
+              <a:srgbClr val="81d41a"/>
+            </a:solidFill>
+          </a:ln>
+        </p:spPr>
+        <p:style>
+          <a:lnRef idx="0"/>
+          <a:fillRef idx="0"/>
+          <a:effectRef idx="0"/>
+          <a:fontRef idx="minor"/>
+        </p:style>
+        <p:txBody>
+          <a:bodyPr lIns="90000" rIns="90000" tIns="45000" bIns="45000" anchor="ctr">
+            <a:noAutofit/>
+          </a:bodyPr>
+          <a:p>
+            <a:pPr algn="ctr">
+              <a:lnSpc>
+                <a:spcPct val="100000"/>
+              </a:lnSpc>
+            </a:pPr>
+            <a:r>
+              <a:rPr b="1" lang="en-US" sz="1800" spc="-1" strike="noStrike" u="sng">
+                <a:solidFill>
+                  <a:srgbClr val="000000"/>
+                </a:solidFill>
+                <a:uFillTx/>
+                <a:latin typeface="Arial"/>
+                <a:ea typeface="DejaVu Sans"/>
+              </a:rPr>
+              <a:t>Shooting</a:t>
+            </a:r>
+            <a:endParaRPr b="0" lang="en-US" sz="1800" spc="-1" strike="noStrike">
+              <a:solidFill>
+                <a:srgbClr val="000000"/>
+              </a:solidFill>
+              <a:latin typeface="Arial"/>
+            </a:endParaRPr>
+          </a:p>
+          <a:p>
+            <a:pPr algn="ctr">
+              <a:lnSpc>
+                <a:spcPct val="100000"/>
+              </a:lnSpc>
+            </a:pPr>
+            <a:r>
+              <a:rPr b="0" lang="en-US" sz="1400" spc="-1" strike="noStrike">
+                <a:solidFill>
+                  <a:srgbClr val="000000"/>
+                </a:solidFill>
+                <a:latin typeface="Arial"/>
+                <a:ea typeface="DejaVu Sans"/>
+              </a:rPr>
+              <a:t>Intake closed,</a:t>
+            </a:r>
+            <a:endParaRPr b="0" lang="en-US" sz="1400" spc="-1" strike="noStrike">
+              <a:solidFill>
+                <a:srgbClr val="000000"/>
+              </a:solidFill>
+              <a:latin typeface="Arial"/>
+            </a:endParaRPr>
+          </a:p>
+          <a:p>
+            <a:pPr algn="ctr">
+              <a:lnSpc>
+                <a:spcPct val="100000"/>
+              </a:lnSpc>
+            </a:pPr>
+            <a:r>
+              <a:rPr b="0" lang="en-US" sz="1400" spc="-1" strike="noStrike">
+                <a:solidFill>
+                  <a:srgbClr val="000000"/>
+                </a:solidFill>
+                <a:latin typeface="Arial"/>
+                <a:ea typeface="DejaVu Sans"/>
+              </a:rPr>
+              <a:t>storage, feeder, spinner on</a:t>
+            </a:r>
+            <a:endParaRPr b="0" lang="en-US" sz="1400" spc="-1" strike="noStrike">
+              <a:solidFill>
+                <a:srgbClr val="000000"/>
+              </a:solidFill>
+              <a:latin typeface="Arial"/>
+            </a:endParaRPr>
+          </a:p>
+        </p:txBody>
+      </p:sp>
+      <p:sp>
+        <p:nvSpPr>
+          <p:cNvPr id="30" name=""/>
+          <p:cNvSpPr/>
+          <p:nvPr/>
+        </p:nvSpPr>
+        <p:spPr>
+          <a:xfrm>
+            <a:off x="4149000" y="4390200"/>
+            <a:ext cx="1599480" cy="1096200"/>
+          </a:xfrm>
+          <a:prstGeom prst="roundRect">
+            <a:avLst>
+              <a:gd name="adj" fmla="val 16667"/>
+            </a:avLst>
+          </a:prstGeom>
+          <a:solidFill>
+            <a:srgbClr val="dde8cb"/>
+          </a:solidFill>
+          <a:ln w="0">
+            <a:solidFill>
+              <a:srgbClr val="81d41a"/>
+            </a:solidFill>
+          </a:ln>
+        </p:spPr>
+        <p:style>
+          <a:lnRef idx="0"/>
+          <a:fillRef idx="0"/>
+          <a:effectRef idx="0"/>
+          <a:fontRef idx="minor"/>
+        </p:style>
+        <p:txBody>
+          <a:bodyPr lIns="90000" rIns="90000" tIns="45000" bIns="45000" anchor="ctr">
+            <a:noAutofit/>
+          </a:bodyPr>
+          <a:p>
+            <a:pPr algn="ctr">
+              <a:lnSpc>
+                <a:spcPct val="100000"/>
+              </a:lnSpc>
+            </a:pPr>
+            <a:r>
+              <a:rPr b="1" lang="en-US" sz="1800" spc="-1" strike="noStrike" u="sng">
+                <a:solidFill>
+                  <a:srgbClr val="000000"/>
+                </a:solidFill>
+                <a:uFillTx/>
+                <a:latin typeface="Arial"/>
+                <a:ea typeface="DejaVu Sans"/>
+              </a:rPr>
+              <a:t>PrepShoot.</a:t>
+            </a:r>
+            <a:endParaRPr b="0" lang="en-US" sz="1800" spc="-1" strike="noStrike">
+              <a:solidFill>
+                <a:srgbClr val="000000"/>
+              </a:solidFill>
+              <a:latin typeface="Arial"/>
+            </a:endParaRPr>
+          </a:p>
+          <a:p>
+            <a:pPr algn="ctr">
+              <a:lnSpc>
+                <a:spcPct val="100000"/>
+              </a:lnSpc>
+            </a:pPr>
+            <a:r>
+              <a:rPr b="0" lang="en-US" sz="1400" spc="-1" strike="noStrike">
+                <a:solidFill>
+                  <a:srgbClr val="000000"/>
+                </a:solidFill>
+                <a:latin typeface="Arial"/>
+                <a:ea typeface="DejaVu Sans"/>
+              </a:rPr>
+              <a:t>Intake closed,</a:t>
+            </a:r>
+            <a:endParaRPr b="0" lang="en-US" sz="1400" spc="-1" strike="noStrike">
+              <a:solidFill>
+                <a:srgbClr val="000000"/>
+              </a:solidFill>
+              <a:latin typeface="Arial"/>
+            </a:endParaRPr>
+          </a:p>
+          <a:p>
+            <a:pPr algn="ctr">
+              <a:lnSpc>
+                <a:spcPct val="100000"/>
+              </a:lnSpc>
+            </a:pPr>
+            <a:r>
+              <a:rPr b="0" lang="en-US" sz="1400" spc="-1" strike="noStrike">
+                <a:solidFill>
+                  <a:srgbClr val="000000"/>
+                </a:solidFill>
+                <a:latin typeface="Arial"/>
+                <a:ea typeface="DejaVu Sans"/>
+              </a:rPr>
+              <a:t>Run spinner up,</a:t>
+            </a:r>
+            <a:endParaRPr b="0" lang="en-US" sz="1400" spc="-1" strike="noStrike">
+              <a:solidFill>
+                <a:srgbClr val="000000"/>
+              </a:solidFill>
+              <a:latin typeface="Arial"/>
+            </a:endParaRPr>
+          </a:p>
+          <a:p>
+            <a:pPr algn="ctr">
+              <a:lnSpc>
+                <a:spcPct val="100000"/>
+              </a:lnSpc>
+            </a:pPr>
+            <a:r>
+              <a:rPr b="0" lang="en-US" sz="1400" spc="-1" strike="noStrike">
+                <a:solidFill>
+                  <a:srgbClr val="000000"/>
+                </a:solidFill>
+                <a:latin typeface="Arial"/>
+                <a:ea typeface="DejaVu Sans"/>
+              </a:rPr>
+              <a:t>storage on, other motors off</a:t>
+            </a:r>
+            <a:endParaRPr b="0" lang="en-US" sz="1400" spc="-1" strike="noStrike">
+              <a:solidFill>
+                <a:srgbClr val="000000"/>
+              </a:solidFill>
+              <a:latin typeface="Arial"/>
+            </a:endParaRPr>
+          </a:p>
+        </p:txBody>
+      </p:sp>
+      <p:cxnSp>
+        <p:nvCxnSpPr>
+          <p:cNvPr id="31" name=""/>
+          <p:cNvCxnSpPr>
+            <a:stCxn id="27" idx="2"/>
+            <a:endCxn id="30" idx="1"/>
+          </p:cNvCxnSpPr>
+          <p:nvPr/>
+        </p:nvCxnSpPr>
+        <p:spPr>
+          <a:xfrm flipH="1" rot="16200000">
+            <a:off x="2626560" y="3415320"/>
+            <a:ext cx="1234800" cy="1810800"/>
+          </a:xfrm>
+          <a:prstGeom prst="curvedConnector2">
+            <a:avLst/>
+          </a:prstGeom>
+          <a:ln w="36720">
+            <a:solidFill>
+              <a:srgbClr val="3465a4"/>
+            </a:solidFill>
+            <a:prstDash val="sysDot"/>
+            <a:round/>
+            <a:tailEnd len="med" type="triangle" w="med"/>
+          </a:ln>
+        </p:spPr>
+      </p:cxnSp>
+      <p:cxnSp>
+        <p:nvCxnSpPr>
+          <p:cNvPr id="32" name=""/>
+          <p:cNvCxnSpPr>
+            <a:stCxn id="30" idx="3"/>
+            <a:endCxn id="29" idx="2"/>
+          </p:cNvCxnSpPr>
+          <p:nvPr/>
+        </p:nvCxnSpPr>
+        <p:spPr>
+          <a:xfrm flipV="1">
+            <a:off x="5748480" y="3716280"/>
+            <a:ext cx="1391040" cy="1222200"/>
+          </a:xfrm>
+          <a:prstGeom prst="curvedConnector2">
+            <a:avLst/>
+          </a:prstGeom>
+          <a:ln w="36720">
+            <a:solidFill>
+              <a:srgbClr val="3465a4"/>
+            </a:solidFill>
+            <a:round/>
+            <a:tailEnd len="med" type="triangle" w="med"/>
+          </a:ln>
+        </p:spPr>
+      </p:cxnSp>
+      <p:cxnSp>
+        <p:nvCxnSpPr>
+          <p:cNvPr id="33" name=""/>
+          <p:cNvCxnSpPr>
+            <a:stCxn id="29" idx="1"/>
+            <a:endCxn id="27" idx="3"/>
+          </p:cNvCxnSpPr>
+          <p:nvPr/>
+        </p:nvCxnSpPr>
+        <p:spPr>
+          <a:xfrm rot="10800000">
+            <a:off x="3138480" y="3246480"/>
+            <a:ext cx="3201480" cy="12960"/>
+          </a:xfrm>
+          <a:prstGeom prst="curvedConnector3">
+            <a:avLst>
+              <a:gd name="adj1" fmla="val 25000"/>
+            </a:avLst>
+          </a:prstGeom>
+          <a:ln w="36720">
+            <a:solidFill>
+              <a:srgbClr val="3465a4"/>
+            </a:solidFill>
+            <a:round/>
+            <a:tailEnd len="med" type="triangle" w="med"/>
+          </a:ln>
+        </p:spPr>
+      </p:cxnSp>
+      <p:sp>
+        <p:nvSpPr>
+          <p:cNvPr id="34" name=""/>
+          <p:cNvSpPr/>
+          <p:nvPr/>
+        </p:nvSpPr>
+        <p:spPr>
+          <a:xfrm>
+            <a:off x="1359000" y="2191320"/>
+            <a:ext cx="1286280" cy="479880"/>
+          </a:xfrm>
+          <a:prstGeom prst="rect">
+            <a:avLst/>
+          </a:prstGeom>
+          <a:noFill/>
+          <a:ln w="0">
+            <a:solidFill>
+              <a:srgbClr val="ffffff">
+                <a:alpha val="0"/>
+              </a:srgbClr>
+            </a:solidFill>
+          </a:ln>
+        </p:spPr>
+        <p:style>
+          <a:lnRef idx="0"/>
+          <a:fillRef idx="0"/>
+          <a:effectRef idx="0"/>
+          <a:fontRef idx="minor"/>
+        </p:style>
+        <p:txBody>
+          <a:bodyPr lIns="90000" rIns="90000" tIns="45000" bIns="45000" anchor="ctr">
+            <a:noAutofit/>
+          </a:bodyPr>
+          <a:p>
+            <a:pPr algn="ctr">
+              <a:lnSpc>
+                <a:spcPct val="100000"/>
+              </a:lnSpc>
+            </a:pPr>
+            <a:r>
+              <a:rPr b="0" lang="en-US" sz="1500" spc="-1" strike="noStrike">
+                <a:solidFill>
+                  <a:srgbClr val="000000"/>
+                </a:solidFill>
+                <a:latin typeface="Arial"/>
+                <a:ea typeface="DejaVu Sans"/>
+              </a:rPr>
+              <a:t>Open  Intake!</a:t>
+            </a:r>
+            <a:endParaRPr b="0" lang="en-US" sz="1500" spc="-1" strike="noStrike">
+              <a:solidFill>
+                <a:srgbClr val="000000"/>
+              </a:solidFill>
+              <a:latin typeface="Arial"/>
+            </a:endParaRPr>
+          </a:p>
+        </p:txBody>
+      </p:sp>
+      <p:sp>
+        <p:nvSpPr>
+          <p:cNvPr id="35" name=""/>
+          <p:cNvSpPr/>
+          <p:nvPr/>
+        </p:nvSpPr>
+        <p:spPr>
+          <a:xfrm>
+            <a:off x="2044800" y="4582800"/>
+            <a:ext cx="829080" cy="263880"/>
+          </a:xfrm>
+          <a:prstGeom prst="rect">
+            <a:avLst/>
+          </a:prstGeom>
+          <a:noFill/>
+          <a:ln w="0">
+            <a:solidFill>
+              <a:srgbClr val="ffffff">
+                <a:alpha val="0"/>
+              </a:srgbClr>
+            </a:solidFill>
+          </a:ln>
+        </p:spPr>
+        <p:style>
+          <a:lnRef idx="0"/>
+          <a:fillRef idx="0"/>
+          <a:effectRef idx="0"/>
+          <a:fontRef idx="minor"/>
+        </p:style>
+        <p:txBody>
+          <a:bodyPr lIns="90000" rIns="90000" tIns="45000" bIns="45000" anchor="ctr">
+            <a:noAutofit/>
+          </a:bodyPr>
+          <a:p>
+            <a:pPr algn="ctr">
+              <a:lnSpc>
+                <a:spcPct val="100000"/>
+              </a:lnSpc>
+            </a:pPr>
+            <a:r>
+              <a:rPr b="0" lang="en-US" sz="1500" spc="-1" strike="noStrike">
+                <a:solidFill>
+                  <a:srgbClr val="000000"/>
+                </a:solidFill>
+                <a:latin typeface="Arial"/>
+                <a:ea typeface="DejaVu Sans"/>
+              </a:rPr>
+              <a:t>Shoot!</a:t>
+            </a:r>
+            <a:endParaRPr b="0" lang="en-US" sz="1500" spc="-1" strike="noStrike">
+              <a:solidFill>
+                <a:srgbClr val="000000"/>
+              </a:solidFill>
+              <a:latin typeface="Arial"/>
+            </a:endParaRPr>
+          </a:p>
+        </p:txBody>
+      </p:sp>
+      <p:sp>
+        <p:nvSpPr>
+          <p:cNvPr id="36" name=""/>
+          <p:cNvSpPr/>
+          <p:nvPr/>
+        </p:nvSpPr>
+        <p:spPr>
+          <a:xfrm>
+            <a:off x="6669720" y="4379400"/>
+            <a:ext cx="1400760" cy="263880"/>
+          </a:xfrm>
+          <a:prstGeom prst="rect">
+            <a:avLst/>
+          </a:prstGeom>
+          <a:noFill/>
+          <a:ln w="0">
+            <a:solidFill>
+              <a:srgbClr val="ffffff">
+                <a:alpha val="0"/>
+              </a:srgbClr>
+            </a:solidFill>
+          </a:ln>
+        </p:spPr>
+        <p:style>
+          <a:lnRef idx="0"/>
+          <a:fillRef idx="0"/>
+          <a:effectRef idx="0"/>
+          <a:fontRef idx="minor"/>
+        </p:style>
+        <p:txBody>
+          <a:bodyPr lIns="90000" rIns="90000" tIns="45000" bIns="45000" anchor="ctr">
+            <a:noAutofit/>
+          </a:bodyPr>
+          <a:p>
+            <a:pPr algn="ctr">
+              <a:lnSpc>
+                <a:spcPct val="100000"/>
+              </a:lnSpc>
+            </a:pPr>
+            <a:r>
+              <a:rPr b="0" lang="en-US" sz="1500" spc="-1" strike="noStrike">
+                <a:solidFill>
+                  <a:srgbClr val="000000"/>
+                </a:solidFill>
+                <a:latin typeface="Arial"/>
+                <a:ea typeface="DejaVu Sans"/>
+              </a:rPr>
+              <a:t>Spinner</a:t>
+            </a:r>
+            <a:br>
+              <a:rPr sz="1500"/>
+            </a:br>
+            <a:r>
+              <a:rPr b="0" lang="en-US" sz="1500" spc="-1" strike="noStrike">
+                <a:solidFill>
+                  <a:srgbClr val="000000"/>
+                </a:solidFill>
+                <a:latin typeface="Arial"/>
+                <a:ea typeface="DejaVu Sans"/>
+              </a:rPr>
+              <a:t> at Speed</a:t>
+            </a:r>
+            <a:endParaRPr b="0" lang="en-US" sz="1500" spc="-1" strike="noStrike">
+              <a:solidFill>
+                <a:srgbClr val="000000"/>
+              </a:solidFill>
+              <a:latin typeface="Arial"/>
+            </a:endParaRPr>
+          </a:p>
+        </p:txBody>
+      </p:sp>
+      <p:sp>
+        <p:nvSpPr>
+          <p:cNvPr id="37" name=""/>
+          <p:cNvSpPr/>
+          <p:nvPr/>
+        </p:nvSpPr>
+        <p:spPr>
+          <a:xfrm>
+            <a:off x="3537000" y="2995200"/>
+            <a:ext cx="2285280" cy="263880"/>
+          </a:xfrm>
+          <a:prstGeom prst="rect">
+            <a:avLst/>
+          </a:prstGeom>
+          <a:noFill/>
+          <a:ln w="0">
+            <a:solidFill>
+              <a:srgbClr val="ffffff">
+                <a:alpha val="0"/>
+              </a:srgbClr>
+            </a:solidFill>
+          </a:ln>
+        </p:spPr>
+        <p:style>
+          <a:lnRef idx="0"/>
+          <a:fillRef idx="0"/>
+          <a:effectRef idx="0"/>
+          <a:fontRef idx="minor"/>
+        </p:style>
+        <p:txBody>
+          <a:bodyPr lIns="90000" rIns="90000" tIns="45000" bIns="45000" anchor="ctr">
+            <a:noAutofit/>
+          </a:bodyPr>
+          <a:p>
+            <a:pPr algn="ctr">
+              <a:lnSpc>
+                <a:spcPct val="100000"/>
+              </a:lnSpc>
+            </a:pPr>
+            <a:r>
+              <a:rPr b="0" lang="en-US" sz="1500" spc="-1" strike="noStrike">
+                <a:solidFill>
+                  <a:srgbClr val="000000"/>
+                </a:solidFill>
+                <a:latin typeface="Arial"/>
+                <a:ea typeface="DejaVu Sans"/>
+              </a:rPr>
+              <a:t>No ball in feeder</a:t>
+            </a:r>
+            <a:endParaRPr b="0" lang="en-US" sz="1500" spc="-1" strike="noStrike">
+              <a:solidFill>
+                <a:srgbClr val="000000"/>
+              </a:solidFill>
+              <a:latin typeface="Arial"/>
+            </a:endParaRPr>
+          </a:p>
+        </p:txBody>
+      </p:sp>
+      <p:cxnSp>
+        <p:nvCxnSpPr>
+          <p:cNvPr id="38" name=""/>
+          <p:cNvCxnSpPr>
+            <a:stCxn id="28" idx="3"/>
+            <a:endCxn id="39" idx="1"/>
+          </p:cNvCxnSpPr>
+          <p:nvPr/>
+        </p:nvCxnSpPr>
+        <p:spPr>
+          <a:xfrm flipV="1">
+            <a:off x="3156480" y="1570320"/>
+            <a:ext cx="1000080" cy="17280"/>
+          </a:xfrm>
+          <a:prstGeom prst="curvedConnector3">
+            <a:avLst>
+              <a:gd name="adj1" fmla="val 25027"/>
+            </a:avLst>
+          </a:prstGeom>
+          <a:ln w="36720">
+            <a:solidFill>
+              <a:srgbClr val="3465a4"/>
+            </a:solidFill>
+            <a:round/>
+            <a:tailEnd len="med" type="triangle" w="med"/>
+          </a:ln>
+        </p:spPr>
+      </p:cxnSp>
+      <p:sp>
+        <p:nvSpPr>
+          <p:cNvPr id="40" name=""/>
+          <p:cNvSpPr/>
+          <p:nvPr/>
+        </p:nvSpPr>
+        <p:spPr>
+          <a:xfrm>
+            <a:off x="3010320" y="1179000"/>
+            <a:ext cx="1108080" cy="263880"/>
+          </a:xfrm>
+          <a:prstGeom prst="rect">
+            <a:avLst/>
+          </a:prstGeom>
+          <a:noFill/>
+          <a:ln w="0">
+            <a:solidFill>
+              <a:srgbClr val="ffffff">
+                <a:alpha val="0"/>
+              </a:srgbClr>
+            </a:solidFill>
+          </a:ln>
+        </p:spPr>
+        <p:style>
+          <a:lnRef idx="0"/>
+          <a:fillRef idx="0"/>
+          <a:effectRef idx="0"/>
+          <a:fontRef idx="minor"/>
+        </p:style>
+        <p:txBody>
+          <a:bodyPr lIns="90000" rIns="90000" tIns="45000" bIns="45000" anchor="ctr">
+            <a:noAutofit/>
+          </a:bodyPr>
+          <a:p>
+            <a:pPr algn="ctr">
+              <a:lnSpc>
+                <a:spcPct val="100000"/>
+              </a:lnSpc>
+            </a:pPr>
+            <a:r>
+              <a:rPr b="0" lang="en-US" sz="1500" spc="-1" strike="noStrike">
+                <a:solidFill>
+                  <a:srgbClr val="000000"/>
+                </a:solidFill>
+                <a:latin typeface="Arial"/>
+                <a:ea typeface="DejaVu Sans"/>
+              </a:rPr>
+              <a:t>Ball in feeder</a:t>
+            </a:r>
+            <a:endParaRPr b="0" lang="en-US" sz="1500" spc="-1" strike="noStrike">
+              <a:solidFill>
+                <a:srgbClr val="000000"/>
+              </a:solidFill>
+              <a:latin typeface="Arial"/>
+            </a:endParaRPr>
+          </a:p>
+        </p:txBody>
+      </p:sp>
+      <p:cxnSp>
+        <p:nvCxnSpPr>
+          <p:cNvPr id="41" name=""/>
+          <p:cNvCxnSpPr>
+            <a:endCxn id="27" idx="1"/>
+          </p:cNvCxnSpPr>
+          <p:nvPr/>
+        </p:nvCxnSpPr>
+        <p:spPr>
+          <a:xfrm flipV="1">
+            <a:off x="834120" y="3246840"/>
+            <a:ext cx="705240" cy="9360"/>
+          </a:xfrm>
+          <a:prstGeom prst="curvedConnector3">
+            <a:avLst>
+              <a:gd name="adj1" fmla="val 5873"/>
+            </a:avLst>
+          </a:prstGeom>
+          <a:ln w="36720">
+            <a:solidFill>
+              <a:srgbClr val="3465a4"/>
+            </a:solidFill>
+            <a:round/>
+            <a:headEnd len="med" type="oval" w="med"/>
+            <a:tailEnd len="med" type="triangle" w="med"/>
+          </a:ln>
+        </p:spPr>
+      </p:cxnSp>
+      <p:cxnSp>
+        <p:nvCxnSpPr>
+          <p:cNvPr id="42" name=""/>
+          <p:cNvCxnSpPr/>
+          <p:nvPr/>
+        </p:nvCxnSpPr>
+        <p:spPr>
+          <a:xfrm flipH="1" rot="16200000">
+            <a:off x="4416840" y="3273840"/>
+            <a:ext cx="2126520" cy="30240"/>
+          </a:xfrm>
+          <a:prstGeom prst="curvedConnector3">
+            <a:avLst>
+              <a:gd name="adj1" fmla="val 25008"/>
+            </a:avLst>
+          </a:prstGeom>
+          <a:ln w="36720">
+            <a:solidFill>
+              <a:srgbClr val="3465a4"/>
+            </a:solidFill>
+            <a:prstDash val="sysDot"/>
+            <a:round/>
+            <a:tailEnd len="med" type="triangle" w="med"/>
+          </a:ln>
+        </p:spPr>
+      </p:cxnSp>
+      <p:sp>
+        <p:nvSpPr>
+          <p:cNvPr id="43" name=""/>
+          <p:cNvSpPr/>
+          <p:nvPr/>
+        </p:nvSpPr>
+        <p:spPr>
+          <a:xfrm>
+            <a:off x="5389200" y="2286000"/>
+            <a:ext cx="829080" cy="274680"/>
+          </a:xfrm>
+          <a:prstGeom prst="rect">
+            <a:avLst/>
+          </a:prstGeom>
+          <a:noFill/>
+          <a:ln w="0">
+            <a:solidFill>
+              <a:srgbClr val="ffffff"/>
+            </a:solidFill>
+          </a:ln>
+        </p:spPr>
+        <p:style>
+          <a:lnRef idx="0"/>
+          <a:fillRef idx="0"/>
+          <a:effectRef idx="0"/>
+          <a:fontRef idx="minor"/>
+        </p:style>
+        <p:txBody>
+          <a:bodyPr lIns="90000" rIns="90000" tIns="45000" bIns="45000" anchor="ctr">
+            <a:noAutofit/>
+          </a:bodyPr>
+          <a:p>
+            <a:pPr algn="ctr">
+              <a:lnSpc>
+                <a:spcPct val="100000"/>
+              </a:lnSpc>
+            </a:pPr>
+            <a:r>
+              <a:rPr b="0" lang="en-US" sz="1500" spc="-1" strike="noStrike">
+                <a:solidFill>
+                  <a:srgbClr val="000000"/>
+                </a:solidFill>
+                <a:latin typeface="Arial"/>
+                <a:ea typeface="DejaVu Sans"/>
+              </a:rPr>
+              <a:t>Shoot!</a:t>
+            </a:r>
+            <a:endParaRPr b="0" lang="en-US" sz="1500" spc="-1" strike="noStrike">
+              <a:solidFill>
+                <a:srgbClr val="000000"/>
+              </a:solidFill>
+              <a:latin typeface="Arial"/>
+            </a:endParaRPr>
+          </a:p>
+        </p:txBody>
+      </p:sp>
+      <p:sp>
+        <p:nvSpPr>
+          <p:cNvPr id="44" name=""/>
+          <p:cNvSpPr/>
+          <p:nvPr/>
+        </p:nvSpPr>
+        <p:spPr>
+          <a:xfrm>
+            <a:off x="4114800" y="3246840"/>
+            <a:ext cx="1371600" cy="456840"/>
+          </a:xfrm>
+          <a:prstGeom prst="rect">
+            <a:avLst/>
+          </a:prstGeom>
+          <a:noFill/>
+          <a:ln w="0">
+            <a:solidFill>
+              <a:srgbClr val="ffffff">
+                <a:alpha val="0"/>
+              </a:srgbClr>
+            </a:solidFill>
+          </a:ln>
+        </p:spPr>
+        <p:style>
+          <a:lnRef idx="0"/>
+          <a:fillRef idx="0"/>
+          <a:effectRef idx="0"/>
+          <a:fontRef idx="minor"/>
+        </p:style>
+        <p:txBody>
+          <a:bodyPr lIns="90000" rIns="90000" tIns="45000" bIns="45000" anchor="ctr">
+            <a:noAutofit/>
+          </a:bodyPr>
+          <a:p>
+            <a:pPr algn="ctr">
+              <a:lnSpc>
+                <a:spcPct val="100000"/>
+              </a:lnSpc>
+            </a:pPr>
+            <a:r>
+              <a:rPr b="0" i="1" lang="en-US" sz="1100" spc="-1" strike="noStrike">
+                <a:solidFill>
+                  <a:srgbClr val="000000"/>
+                </a:solidFill>
+                <a:latin typeface="Arial"/>
+                <a:ea typeface="DejaVu Sans"/>
+              </a:rPr>
+              <a:t>Bridge short gaps between balls</a:t>
+            </a:r>
+            <a:endParaRPr b="0" lang="en-US" sz="1100" spc="-1" strike="noStrike">
+              <a:solidFill>
+                <a:srgbClr val="000000"/>
+              </a:solidFill>
+              <a:latin typeface="Arial"/>
+            </a:endParaRPr>
+          </a:p>
+        </p:txBody>
+      </p:sp>
+      <p:sp>
+        <p:nvSpPr>
+          <p:cNvPr id="45" name=""/>
+          <p:cNvSpPr txBox="1"/>
+          <p:nvPr/>
+        </p:nvSpPr>
+        <p:spPr>
+          <a:xfrm>
+            <a:off x="504360" y="71640"/>
+            <a:ext cx="9070920" cy="625320"/>
+          </a:xfrm>
+          <a:prstGeom prst="rect">
+            <a:avLst/>
+          </a:prstGeom>
+          <a:noFill/>
+          <a:ln w="0">
+            <a:noFill/>
+          </a:ln>
+        </p:spPr>
+        <p:txBody>
+          <a:bodyPr lIns="0" rIns="0" tIns="0" bIns="0" anchor="ctr">
+            <a:noAutofit/>
+          </a:bodyPr>
+          <a:p>
+            <a:pPr algn="ctr"/>
+            <a:r>
+              <a:rPr b="0" lang="en-US" sz="4400" spc="-1" strike="noStrike">
+                <a:solidFill>
+                  <a:srgbClr val="000000"/>
+                </a:solidFill>
+                <a:latin typeface="Arial"/>
+              </a:rPr>
+              <a:t>Idea 2</a:t>
+            </a:r>
+            <a:endParaRPr b="0" lang="en-US" sz="4400" spc="-1" strike="noStrike">
+              <a:solidFill>
+                <a:srgbClr val="000000"/>
+              </a:solidFill>
+              <a:latin typeface="Arial"/>
+            </a:endParaRPr>
+          </a:p>
+        </p:txBody>
+      </p:sp>
+      <p:sp>
+        <p:nvSpPr>
+          <p:cNvPr id="39" name=""/>
+          <p:cNvSpPr/>
+          <p:nvPr/>
+        </p:nvSpPr>
+        <p:spPr>
+          <a:xfrm>
+            <a:off x="4156200" y="999000"/>
+            <a:ext cx="1599480" cy="1143000"/>
+          </a:xfrm>
+          <a:prstGeom prst="roundRect">
+            <a:avLst>
+              <a:gd name="adj" fmla="val 16667"/>
+            </a:avLst>
+          </a:prstGeom>
+          <a:solidFill>
+            <a:srgbClr val="dde8cb"/>
+          </a:solidFill>
+          <a:ln w="0">
+            <a:solidFill>
+              <a:srgbClr val="81d41a"/>
+            </a:solidFill>
+          </a:ln>
+        </p:spPr>
+        <p:style>
+          <a:lnRef idx="0"/>
+          <a:fillRef idx="0"/>
+          <a:effectRef idx="0"/>
+          <a:fontRef idx="minor"/>
+        </p:style>
+        <p:txBody>
+          <a:bodyPr lIns="90000" rIns="90000" tIns="45000" bIns="45000" anchor="ctr">
+            <a:noAutofit/>
+          </a:bodyPr>
+          <a:p>
+            <a:pPr algn="ctr">
+              <a:lnSpc>
+                <a:spcPct val="100000"/>
+              </a:lnSpc>
+            </a:pPr>
+            <a:r>
+              <a:rPr b="1" lang="en-US" sz="1800" spc="-1" strike="noStrike" u="sng">
+                <a:solidFill>
+                  <a:srgbClr val="000000"/>
+                </a:solidFill>
+                <a:uFillTx/>
+                <a:latin typeface="Arial"/>
+                <a:ea typeface="DejaVu Sans"/>
+              </a:rPr>
+              <a:t>Store</a:t>
+            </a:r>
+            <a:endParaRPr b="0" lang="en-US" sz="1800" spc="-1" strike="noStrike">
+              <a:solidFill>
+                <a:srgbClr val="000000"/>
+              </a:solidFill>
+              <a:latin typeface="Arial"/>
+            </a:endParaRPr>
+          </a:p>
+          <a:p>
+            <a:pPr algn="ctr">
+              <a:lnSpc>
+                <a:spcPct val="100000"/>
+              </a:lnSpc>
+            </a:pPr>
+            <a:r>
+              <a:rPr b="0" lang="en-US" sz="1400" spc="-1" strike="noStrike">
+                <a:solidFill>
+                  <a:srgbClr val="000000"/>
+                </a:solidFill>
+                <a:latin typeface="Arial"/>
+                <a:ea typeface="DejaVu Sans"/>
+              </a:rPr>
+              <a:t>Intake closed,</a:t>
+            </a:r>
+            <a:endParaRPr b="0" lang="en-US" sz="1400" spc="-1" strike="noStrike">
+              <a:solidFill>
+                <a:srgbClr val="000000"/>
+              </a:solidFill>
+              <a:latin typeface="Arial"/>
+            </a:endParaRPr>
+          </a:p>
+          <a:p>
+            <a:pPr algn="ctr">
+              <a:lnSpc>
+                <a:spcPct val="100000"/>
+              </a:lnSpc>
+            </a:pPr>
+            <a:r>
+              <a:rPr b="0" lang="en-US" sz="1400" spc="-1" strike="noStrike">
+                <a:solidFill>
+                  <a:srgbClr val="000000"/>
+                </a:solidFill>
+                <a:latin typeface="Arial"/>
+                <a:ea typeface="DejaVu Sans"/>
+              </a:rPr>
+              <a:t> </a:t>
+            </a:r>
+            <a:r>
+              <a:rPr b="0" lang="en-US" sz="1400" spc="-1" strike="noStrike">
+                <a:solidFill>
+                  <a:srgbClr val="000000"/>
+                </a:solidFill>
+                <a:latin typeface="Arial"/>
+                <a:ea typeface="DejaVu Sans"/>
+              </a:rPr>
+              <a:t>storage on, feeder on until ball in feeder</a:t>
+            </a:r>
+            <a:endParaRPr b="0" lang="en-US" sz="1400" spc="-1" strike="noStrike">
+              <a:solidFill>
+                <a:srgbClr val="000000"/>
+              </a:solidFill>
+              <a:latin typeface="Arial"/>
+            </a:endParaRPr>
+          </a:p>
+        </p:txBody>
+      </p:sp>
+      <p:cxnSp>
+        <p:nvCxnSpPr>
+          <p:cNvPr id="46" name=""/>
+          <p:cNvCxnSpPr>
+            <a:stCxn id="27" idx="0"/>
+            <a:endCxn id="28" idx="2"/>
+          </p:cNvCxnSpPr>
+          <p:nvPr/>
+        </p:nvCxnSpPr>
+        <p:spPr>
+          <a:xfrm flipV="1">
+            <a:off x="2338560" y="2044080"/>
+            <a:ext cx="18360" cy="746280"/>
+          </a:xfrm>
+          <a:prstGeom prst="straightConnector1">
+            <a:avLst/>
+          </a:prstGeom>
+          <a:ln w="36720">
+            <a:solidFill>
+              <a:srgbClr val="3465a4"/>
+            </a:solidFill>
+            <a:round/>
+            <a:tailEnd len="med" type="triangle" w="med"/>
+          </a:ln>
+        </p:spPr>
+      </p:cxnSp>
+      <p:sp>
+        <p:nvSpPr>
+          <p:cNvPr id="47" name=""/>
+          <p:cNvSpPr/>
+          <p:nvPr/>
+        </p:nvSpPr>
+        <p:spPr>
+          <a:xfrm>
+            <a:off x="1359000" y="2191320"/>
+            <a:ext cx="1286280" cy="479880"/>
+          </a:xfrm>
+          <a:prstGeom prst="rect">
+            <a:avLst/>
+          </a:prstGeom>
+          <a:noFill/>
+          <a:ln w="0">
+            <a:solidFill>
+              <a:srgbClr val="ffffff">
+                <a:alpha val="0"/>
+              </a:srgbClr>
+            </a:solidFill>
+          </a:ln>
+        </p:spPr>
+        <p:style>
+          <a:lnRef idx="0"/>
+          <a:fillRef idx="0"/>
+          <a:effectRef idx="0"/>
+          <a:fontRef idx="minor"/>
+        </p:style>
+        <p:txBody>
+          <a:bodyPr lIns="90000" rIns="90000" tIns="45000" bIns="45000" anchor="ctr">
+            <a:noAutofit/>
+          </a:bodyPr>
+          <a:p>
+            <a:pPr algn="ctr">
+              <a:lnSpc>
+                <a:spcPct val="100000"/>
+              </a:lnSpc>
+            </a:pPr>
+            <a:r>
+              <a:rPr b="0" lang="en-US" sz="1500" spc="-1" strike="noStrike">
+                <a:solidFill>
+                  <a:srgbClr val="000000"/>
+                </a:solidFill>
+                <a:latin typeface="Arial"/>
+                <a:ea typeface="DejaVu Sans"/>
+              </a:rPr>
+              <a:t>Open  Intake!</a:t>
+            </a:r>
+            <a:endParaRPr b="0" lang="en-US" sz="1500" spc="-1" strike="noStrike">
+              <a:solidFill>
+                <a:srgbClr val="000000"/>
+              </a:solidFill>
+              <a:latin typeface="Arial"/>
+            </a:endParaRPr>
+          </a:p>
+        </p:txBody>
+      </p:sp>
+      <p:sp>
+        <p:nvSpPr>
+          <p:cNvPr id="48" name=""/>
+          <p:cNvSpPr/>
+          <p:nvPr/>
+        </p:nvSpPr>
+        <p:spPr>
+          <a:xfrm>
+            <a:off x="2995200" y="1662120"/>
+            <a:ext cx="1286280" cy="479880"/>
+          </a:xfrm>
+          <a:prstGeom prst="rect">
+            <a:avLst/>
+          </a:prstGeom>
+          <a:noFill/>
+          <a:ln w="0">
+            <a:solidFill>
+              <a:srgbClr val="ffffff">
+                <a:alpha val="0"/>
+              </a:srgbClr>
+            </a:solidFill>
+          </a:ln>
+        </p:spPr>
+        <p:style>
+          <a:lnRef idx="0"/>
+          <a:fillRef idx="0"/>
+          <a:effectRef idx="0"/>
+          <a:fontRef idx="minor"/>
+        </p:style>
+        <p:txBody>
+          <a:bodyPr lIns="90000" rIns="90000" tIns="45000" bIns="45000" anchor="ctr">
+            <a:noAutofit/>
+          </a:bodyPr>
+          <a:p>
+            <a:pPr algn="ctr">
+              <a:lnSpc>
+                <a:spcPct val="100000"/>
+              </a:lnSpc>
+            </a:pPr>
+            <a:r>
+              <a:rPr b="0" lang="en-US" sz="1500" spc="-1" strike="noStrike">
+                <a:solidFill>
+                  <a:srgbClr val="000000"/>
+                </a:solidFill>
+                <a:latin typeface="Arial"/>
+                <a:ea typeface="DejaVu Sans"/>
+              </a:rPr>
+              <a:t>Close  Intake!</a:t>
+            </a:r>
+            <a:endParaRPr b="0" lang="en-US" sz="1500" spc="-1" strike="noStrike">
+              <a:solidFill>
+                <a:srgbClr val="000000"/>
+              </a:solidFill>
+              <a:latin typeface="Arial"/>
+            </a:endParaRPr>
+          </a:p>
+        </p:txBody>
+      </p:sp>
+      <p:cxnSp>
+        <p:nvCxnSpPr>
+          <p:cNvPr id="49" name=""/>
+          <p:cNvCxnSpPr/>
+          <p:nvPr/>
+        </p:nvCxnSpPr>
+        <p:spPr>
+          <a:xfrm flipH="1" rot="16200000">
+            <a:off x="2584440" y="2557440"/>
+            <a:ext cx="2330280" cy="1280520"/>
+          </a:xfrm>
+          <a:prstGeom prst="curvedConnector3">
+            <a:avLst>
+              <a:gd name="adj1" fmla="val 25000"/>
+            </a:avLst>
+          </a:prstGeom>
+          <a:ln w="36720">
+            <a:solidFill>
+              <a:srgbClr val="3465a4"/>
+            </a:solidFill>
+            <a:prstDash val="sysDot"/>
+            <a:round/>
+            <a:tailEnd len="med" type="triangle" w="med"/>
+          </a:ln>
+        </p:spPr>
+      </p:cxnSp>
+      <p:sp>
+        <p:nvSpPr>
+          <p:cNvPr id="50" name=""/>
+          <p:cNvSpPr/>
+          <p:nvPr/>
+        </p:nvSpPr>
+        <p:spPr>
+          <a:xfrm>
+            <a:off x="3085200" y="2430000"/>
+            <a:ext cx="829080" cy="274680"/>
+          </a:xfrm>
+          <a:prstGeom prst="rect">
+            <a:avLst/>
+          </a:prstGeom>
+          <a:noFill/>
+          <a:ln w="0">
+            <a:solidFill>
+              <a:srgbClr val="ffffff"/>
+            </a:solidFill>
+          </a:ln>
+        </p:spPr>
+        <p:style>
+          <a:lnRef idx="0"/>
+          <a:fillRef idx="0"/>
+          <a:effectRef idx="0"/>
+          <a:fontRef idx="minor"/>
+        </p:style>
+        <p:txBody>
+          <a:bodyPr lIns="90000" rIns="90000" tIns="45000" bIns="45000" anchor="ctr">
+            <a:noAutofit/>
+          </a:bodyPr>
+          <a:p>
+            <a:pPr algn="ctr">
+              <a:lnSpc>
+                <a:spcPct val="100000"/>
+              </a:lnSpc>
+            </a:pPr>
+            <a:r>
+              <a:rPr b="0" lang="en-US" sz="1500" spc="-1" strike="noStrike">
+                <a:solidFill>
+                  <a:srgbClr val="000000"/>
+                </a:solidFill>
+                <a:latin typeface="Arial"/>
+                <a:ea typeface="DejaVu Sans"/>
+              </a:rPr>
+              <a:t>Shoot!</a:t>
+            </a:r>
+            <a:endParaRPr b="0" lang="en-US" sz="1500" spc="-1" strike="noStrike">
+              <a:solidFill>
+                <a:srgbClr val="000000"/>
+              </a:solidFill>
+              <a:latin typeface="Arial"/>
+            </a:endParaRPr>
+          </a:p>
+        </p:txBody>
+      </p:sp>
+      <p:sp>
+        <p:nvSpPr>
+          <p:cNvPr id="51" name=""/>
+          <p:cNvSpPr/>
+          <p:nvPr/>
+        </p:nvSpPr>
+        <p:spPr>
+          <a:xfrm>
+            <a:off x="5715000" y="1323360"/>
+            <a:ext cx="1371600" cy="456840"/>
+          </a:xfrm>
+          <a:prstGeom prst="rect">
+            <a:avLst/>
+          </a:prstGeom>
+          <a:noFill/>
+          <a:ln w="0">
+            <a:solidFill>
+              <a:srgbClr val="ffffff">
+                <a:alpha val="0"/>
+              </a:srgbClr>
+            </a:solidFill>
+          </a:ln>
+        </p:spPr>
+        <p:style>
+          <a:lnRef idx="0"/>
+          <a:fillRef idx="0"/>
+          <a:effectRef idx="0"/>
+          <a:fontRef idx="minor"/>
+        </p:style>
+        <p:txBody>
+          <a:bodyPr lIns="90000" rIns="90000" tIns="45000" bIns="45000" anchor="ctr">
+            <a:noAutofit/>
+          </a:bodyPr>
+          <a:p>
+            <a:pPr algn="ctr">
+              <a:lnSpc>
+                <a:spcPct val="100000"/>
+              </a:lnSpc>
+            </a:pPr>
+            <a:r>
+              <a:rPr b="0" i="1" lang="en-US" sz="1100" spc="-1" strike="noStrike">
+                <a:solidFill>
+                  <a:srgbClr val="000000"/>
+                </a:solidFill>
+                <a:latin typeface="Arial"/>
+                <a:ea typeface="DejaVu Sans"/>
+              </a:rPr>
+              <a:t>‘</a:t>
+            </a:r>
+            <a:r>
+              <a:rPr b="0" i="1" lang="en-US" sz="1100" spc="-1" strike="noStrike">
+                <a:solidFill>
+                  <a:srgbClr val="000000"/>
+                </a:solidFill>
+                <a:latin typeface="Arial"/>
+                <a:ea typeface="DejaVu Sans"/>
+              </a:rPr>
+              <a:t>Store’ keeps moving balls to feeder</a:t>
+            </a:r>
+            <a:endParaRPr b="0" lang="en-US" sz="1100" spc="-1" strike="noStrike">
               <a:solidFill>
                 <a:srgbClr val="000000"/>
               </a:solidFill>

--- a/Diagrams.pptx
+++ b/Diagrams.pptx
@@ -43,7 +43,7 @@
         <p:spPr>
           <a:xfrm>
             <a:off x="504000" y="226080"/>
-            <a:ext cx="9070920" cy="945720"/>
+            <a:ext cx="9070560" cy="945360"/>
           </a:xfrm>
           <a:prstGeom prst="rect">
             <a:avLst/>
@@ -144,7 +144,7 @@
         <p:txBody>
           <a:bodyPr/>
           <a:p>
-            <a:fld id="{601D2B88-73A0-4B3B-82BD-8BAF86A8CBFE}" type="slidenum">
+            <a:fld id="{0D96953C-0B84-41A8-BE64-43764F74AF08}" type="slidenum">
               <a:t>&lt;#&gt;</a:t>
             </a:fld>
           </a:p>
@@ -206,7 +206,7 @@
         <p:spPr>
           <a:xfrm>
             <a:off x="504000" y="226080"/>
-            <a:ext cx="9070920" cy="945720"/>
+            <a:ext cx="9070560" cy="945360"/>
           </a:xfrm>
           <a:prstGeom prst="rect">
             <a:avLst/>
@@ -255,7 +255,7 @@
         <p:spPr>
           <a:xfrm>
             <a:off x="3447360" y="5165280"/>
-            <a:ext cx="3194280" cy="389880"/>
+            <a:ext cx="3193920" cy="389520"/>
           </a:xfrm>
           <a:prstGeom prst="rect">
             <a:avLst/>
@@ -327,7 +327,7 @@
         <p:spPr>
           <a:xfrm>
             <a:off x="7227360" y="5165280"/>
-            <a:ext cx="2347560" cy="389880"/>
+            <a:ext cx="2347200" cy="389520"/>
           </a:xfrm>
           <a:prstGeom prst="rect">
             <a:avLst/>
@@ -368,7 +368,7 @@
                 <a:tab algn="l" pos="0"/>
               </a:tabLst>
             </a:pPr>
-            <a:fld id="{CE93B5D0-FE20-4F28-AEA3-86D6359C1A3F}" type="slidenum">
+            <a:fld id="{98250038-E98B-4A8C-88FA-6CB60E8667A9}" type="slidenum">
               <a:rPr b="0" lang="en-US" sz="1400" spc="-1" strike="noStrike">
                 <a:solidFill>
                   <a:srgbClr val="000000"/>
@@ -399,7 +399,7 @@
         <p:spPr>
           <a:xfrm>
             <a:off x="504000" y="5165280"/>
-            <a:ext cx="2347560" cy="389880"/>
+            <a:ext cx="2347200" cy="389520"/>
           </a:xfrm>
           <a:prstGeom prst="rect">
             <a:avLst/>
@@ -706,7 +706,7 @@
         <p:spPr>
           <a:xfrm>
             <a:off x="1827000" y="2790000"/>
-            <a:ext cx="1599480" cy="913680"/>
+            <a:ext cx="1599120" cy="913320"/>
           </a:xfrm>
           <a:prstGeom prst="roundRect">
             <a:avLst>
@@ -813,7 +813,7 @@
         <p:spPr>
           <a:xfrm>
             <a:off x="4113000" y="1130400"/>
-            <a:ext cx="1599480" cy="913680"/>
+            <a:ext cx="1599120" cy="913320"/>
           </a:xfrm>
           <a:prstGeom prst="roundRect">
             <a:avLst>
@@ -930,7 +930,7 @@
         <p:spPr>
           <a:xfrm>
             <a:off x="6627600" y="2802600"/>
-            <a:ext cx="1599480" cy="913680"/>
+            <a:ext cx="1599120" cy="913320"/>
           </a:xfrm>
           <a:prstGeom prst="roundRect">
             <a:avLst>
@@ -1037,7 +1037,7 @@
         <p:spPr>
           <a:xfrm>
             <a:off x="4113000" y="4390200"/>
-            <a:ext cx="1599480" cy="913680"/>
+            <a:ext cx="1599120" cy="913320"/>
           </a:xfrm>
           <a:prstGeom prst="roundRect">
             <a:avLst>
@@ -1147,7 +1147,7 @@
         <p:spPr>
           <a:xfrm flipH="1" flipV="1" rot="5400000">
             <a:off x="2768040" y="1445400"/>
-            <a:ext cx="1203120" cy="1486800"/>
+            <a:ext cx="1203480" cy="1486800"/>
           </a:xfrm>
           <a:prstGeom prst="curvedConnector2">
             <a:avLst/>
@@ -1173,7 +1173,7 @@
         </p:nvCxnSpPr>
         <p:spPr>
           <a:xfrm flipH="1" rot="16200000">
-            <a:off x="2797920" y="3531960"/>
+            <a:off x="2797920" y="3531600"/>
             <a:ext cx="1143720" cy="1486800"/>
           </a:xfrm>
           <a:prstGeom prst="curvedConnector2">
@@ -1199,8 +1199,8 @@
         </p:nvCxnSpPr>
         <p:spPr>
           <a:xfrm flipV="1">
-            <a:off x="5712480" y="3716280"/>
-            <a:ext cx="1715040" cy="1131120"/>
+            <a:off x="5712120" y="3715920"/>
+            <a:ext cx="1715400" cy="1131120"/>
           </a:xfrm>
           <a:prstGeom prst="curvedConnector2">
             <a:avLst/>
@@ -1225,12 +1225,12 @@
         </p:nvCxnSpPr>
         <p:spPr>
           <a:xfrm rot="10800000">
-            <a:off x="3426480" y="3246480"/>
-            <a:ext cx="3201480" cy="12960"/>
+            <a:off x="3425760" y="3246120"/>
+            <a:ext cx="3201840" cy="12960"/>
           </a:xfrm>
           <a:prstGeom prst="curvedConnector3">
             <a:avLst>
-              <a:gd name="adj1" fmla="val 25000"/>
+              <a:gd name="adj1" fmla="val 24997"/>
             </a:avLst>
           </a:prstGeom>
           <a:ln w="36720">
@@ -1251,7 +1251,7 @@
         <p:spPr>
           <a:xfrm>
             <a:off x="1935000" y="1490400"/>
-            <a:ext cx="1286280" cy="479880"/>
+            <a:ext cx="1285920" cy="479520"/>
           </a:xfrm>
           <a:prstGeom prst="rect">
             <a:avLst/>
@@ -1309,7 +1309,7 @@
         <p:spPr>
           <a:xfrm>
             <a:off x="2332800" y="4582800"/>
-            <a:ext cx="829080" cy="263880"/>
+            <a:ext cx="828720" cy="263520"/>
           </a:xfrm>
           <a:prstGeom prst="rect">
             <a:avLst/>
@@ -1367,7 +1367,7 @@
         <p:spPr>
           <a:xfrm>
             <a:off x="6957720" y="4379400"/>
-            <a:ext cx="1400760" cy="263880"/>
+            <a:ext cx="1400400" cy="263520"/>
           </a:xfrm>
           <a:prstGeom prst="rect">
             <a:avLst/>
@@ -1438,7 +1438,7 @@
         <p:spPr>
           <a:xfrm>
             <a:off x="3537000" y="2995200"/>
-            <a:ext cx="2285280" cy="263880"/>
+            <a:ext cx="2284920" cy="263520"/>
           </a:xfrm>
           <a:prstGeom prst="rect">
             <a:avLst/>
@@ -1497,12 +1497,12 @@
         </p:nvCxnSpPr>
         <p:spPr>
           <a:xfrm rot="5400000">
-            <a:off x="3769920" y="1701000"/>
-            <a:ext cx="799560" cy="1486080"/>
+            <a:off x="3769560" y="1700640"/>
+            <a:ext cx="800280" cy="1486440"/>
           </a:xfrm>
           <a:prstGeom prst="curvedConnector3">
             <a:avLst>
-              <a:gd name="adj1" fmla="val 41891"/>
+              <a:gd name="adj1" fmla="val 41899"/>
             </a:avLst>
           </a:prstGeom>
           <a:ln w="36720">
@@ -1523,7 +1523,7 @@
         <p:spPr>
           <a:xfrm>
             <a:off x="3619800" y="2203200"/>
-            <a:ext cx="1108080" cy="263880"/>
+            <a:ext cx="1107720" cy="263520"/>
           </a:xfrm>
           <a:prstGeom prst="rect">
             <a:avLst/>
@@ -1582,8 +1582,8 @@
         </p:nvCxnSpPr>
         <p:spPr>
           <a:xfrm flipV="1">
-            <a:off x="1122120" y="3246840"/>
-            <a:ext cx="705240" cy="9360"/>
+            <a:off x="1122120" y="3246480"/>
+            <a:ext cx="705240" cy="10080"/>
           </a:xfrm>
           <a:prstGeom prst="curvedConnector3">
             <a:avLst>
@@ -1608,12 +1608,12 @@
         </p:nvCxnSpPr>
         <p:spPr>
           <a:xfrm rot="5400000">
-            <a:off x="4439160" y="3154680"/>
-            <a:ext cx="2160720" cy="17640"/>
+            <a:off x="4438800" y="3154680"/>
+            <a:ext cx="2161080" cy="18000"/>
           </a:xfrm>
           <a:prstGeom prst="curvedConnector3">
             <a:avLst>
-              <a:gd name="adj1" fmla="val 25012"/>
+              <a:gd name="adj1" fmla="val 25008"/>
             </a:avLst>
           </a:prstGeom>
           <a:ln w="36720">
@@ -1635,7 +1635,7 @@
         <p:spPr>
           <a:xfrm>
             <a:off x="5533200" y="2296800"/>
-            <a:ext cx="829080" cy="263880"/>
+            <a:ext cx="828720" cy="263520"/>
           </a:xfrm>
           <a:prstGeom prst="rect">
             <a:avLst/>
@@ -1691,7 +1691,7 @@
         <p:spPr>
           <a:xfrm>
             <a:off x="6544800" y="4788000"/>
-            <a:ext cx="2285640" cy="456840"/>
+            <a:ext cx="2285280" cy="456480"/>
           </a:xfrm>
           <a:prstGeom prst="rect">
             <a:avLst/>
@@ -1753,13 +1753,13 @@
       <p:sp>
         <p:nvSpPr>
           <p:cNvPr id="25" name=""/>
-          <p:cNvSpPr txBox="1"/>
+          <p:cNvSpPr/>
           <p:nvPr/>
         </p:nvSpPr>
         <p:spPr>
           <a:xfrm>
             <a:off x="504360" y="71640"/>
-            <a:ext cx="9070920" cy="625320"/>
+            <a:ext cx="9070560" cy="624960"/>
           </a:xfrm>
           <a:prstGeom prst="rect">
             <a:avLst/>
@@ -1769,12 +1769,22 @@
             <a:noFill/>
           </a:ln>
         </p:spPr>
+        <p:style>
+          <a:lnRef idx="0"/>
+          <a:fillRef idx="0"/>
+          <a:effectRef idx="0"/>
+          <a:fontRef idx="minor"/>
+        </p:style>
         <p:txBody>
           <a:bodyPr lIns="0" rIns="0" tIns="0" bIns="0" anchor="ctr">
             <a:noAutofit/>
           </a:bodyPr>
           <a:p>
-            <a:pPr algn="ctr"/>
+            <a:pPr algn="ctr">
+              <a:lnSpc>
+                <a:spcPct val="100000"/>
+              </a:lnSpc>
+            </a:pPr>
             <a:r>
               <a:rPr b="0" lang="en-US" sz="4400" spc="-1" strike="noStrike">
                 <a:solidFill>
@@ -1802,7 +1812,7 @@
         <p:spPr>
           <a:xfrm>
             <a:off x="4114800" y="3246840"/>
-            <a:ext cx="1371600" cy="456840"/>
+            <a:ext cx="1371240" cy="456480"/>
           </a:xfrm>
           <a:prstGeom prst="rect">
             <a:avLst/>
@@ -1890,7 +1900,7 @@
         <p:spPr>
           <a:xfrm>
             <a:off x="1539000" y="2790000"/>
-            <a:ext cx="1599480" cy="913680"/>
+            <a:ext cx="1599120" cy="913320"/>
           </a:xfrm>
           <a:prstGeom prst="roundRect">
             <a:avLst>
@@ -1997,7 +2007,7 @@
         <p:spPr>
           <a:xfrm>
             <a:off x="1557000" y="1130400"/>
-            <a:ext cx="1599480" cy="913680"/>
+            <a:ext cx="1599120" cy="913320"/>
           </a:xfrm>
           <a:prstGeom prst="roundRect">
             <a:avLst>
@@ -2114,7 +2124,7 @@
         <p:spPr>
           <a:xfrm>
             <a:off x="6339600" y="2802600"/>
-            <a:ext cx="1599480" cy="913680"/>
+            <a:ext cx="1599120" cy="913320"/>
           </a:xfrm>
           <a:prstGeom prst="roundRect">
             <a:avLst>
@@ -2221,7 +2231,7 @@
         <p:spPr>
           <a:xfrm>
             <a:off x="4149000" y="4390200"/>
-            <a:ext cx="1599480" cy="1096200"/>
+            <a:ext cx="1599120" cy="1095840"/>
           </a:xfrm>
           <a:prstGeom prst="roundRect">
             <a:avLst>
@@ -2353,8 +2363,8 @@
         </p:nvCxnSpPr>
         <p:spPr>
           <a:xfrm flipH="1" rot="16200000">
-            <a:off x="2626560" y="3415320"/>
-            <a:ext cx="1234800" cy="1810800"/>
+            <a:off x="2626200" y="3415320"/>
+            <a:ext cx="1235160" cy="1810800"/>
           </a:xfrm>
           <a:prstGeom prst="curvedConnector2">
             <a:avLst/>
@@ -2380,8 +2390,8 @@
         </p:nvCxnSpPr>
         <p:spPr>
           <a:xfrm flipV="1">
-            <a:off x="5748480" y="3716280"/>
-            <a:ext cx="1391040" cy="1222200"/>
+            <a:off x="5748120" y="3715920"/>
+            <a:ext cx="1391400" cy="1222560"/>
           </a:xfrm>
           <a:prstGeom prst="curvedConnector2">
             <a:avLst/>
@@ -2400,19 +2410,17 @@
           <p:cNvPr id="33" name=""/>
           <p:cNvCxnSpPr>
             <a:stCxn id="29" idx="1"/>
-            <a:endCxn id="27" idx="3"/>
+            <a:endCxn id="34" idx="2"/>
           </p:cNvCxnSpPr>
           <p:nvPr/>
         </p:nvCxnSpPr>
         <p:spPr>
           <a:xfrm rot="10800000">
-            <a:off x="3138480" y="3246480"/>
-            <a:ext cx="3201480" cy="12960"/>
-          </a:xfrm>
-          <a:prstGeom prst="curvedConnector3">
-            <a:avLst>
-              <a:gd name="adj1" fmla="val 25000"/>
-            </a:avLst>
+            <a:off x="4955760" y="2141640"/>
+            <a:ext cx="1384200" cy="1117800"/>
+          </a:xfrm>
+          <a:prstGeom prst="curvedConnector2">
+            <a:avLst/>
           </a:prstGeom>
           <a:ln w="36720">
             <a:solidFill>
@@ -2425,14 +2433,14 @@
       </p:cxnSp>
       <p:sp>
         <p:nvSpPr>
-          <p:cNvPr id="34" name=""/>
+          <p:cNvPr id="35" name=""/>
           <p:cNvSpPr/>
           <p:nvPr/>
         </p:nvSpPr>
         <p:spPr>
           <a:xfrm>
             <a:off x="1359000" y="2191320"/>
-            <a:ext cx="1286280" cy="479880"/>
+            <a:ext cx="1285920" cy="479520"/>
           </a:xfrm>
           <a:prstGeom prst="rect">
             <a:avLst/>
@@ -2483,14 +2491,14 @@
       </p:sp>
       <p:sp>
         <p:nvSpPr>
-          <p:cNvPr id="35" name=""/>
+          <p:cNvPr id="36" name=""/>
           <p:cNvSpPr/>
           <p:nvPr/>
         </p:nvSpPr>
         <p:spPr>
           <a:xfrm>
             <a:off x="2044800" y="4582800"/>
-            <a:ext cx="829080" cy="263880"/>
+            <a:ext cx="828720" cy="263520"/>
           </a:xfrm>
           <a:prstGeom prst="rect">
             <a:avLst/>
@@ -2541,14 +2549,14 @@
       </p:sp>
       <p:sp>
         <p:nvSpPr>
-          <p:cNvPr id="36" name=""/>
+          <p:cNvPr id="37" name=""/>
           <p:cNvSpPr/>
           <p:nvPr/>
         </p:nvSpPr>
         <p:spPr>
           <a:xfrm>
             <a:off x="6669720" y="4379400"/>
-            <a:ext cx="1400760" cy="263880"/>
+            <a:ext cx="1400400" cy="263520"/>
           </a:xfrm>
           <a:prstGeom prst="rect">
             <a:avLst/>
@@ -2612,14 +2620,14 @@
       </p:sp>
       <p:sp>
         <p:nvSpPr>
-          <p:cNvPr id="37" name=""/>
+          <p:cNvPr id="38" name=""/>
           <p:cNvSpPr/>
           <p:nvPr/>
         </p:nvSpPr>
         <p:spPr>
           <a:xfrm>
             <a:off x="3537000" y="2995200"/>
-            <a:ext cx="2285280" cy="263880"/>
+            <a:ext cx="2284920" cy="263520"/>
           </a:xfrm>
           <a:prstGeom prst="rect">
             <a:avLst/>
@@ -2670,21 +2678,18 @@
       </p:sp>
       <p:cxnSp>
         <p:nvCxnSpPr>
-          <p:cNvPr id="38" name=""/>
-          <p:cNvCxnSpPr>
-            <a:stCxn id="28" idx="3"/>
-            <a:endCxn id="39" idx="1"/>
-          </p:cNvCxnSpPr>
+          <p:cNvPr id="39" name=""/>
+          <p:cNvCxnSpPr/>
           <p:nvPr/>
         </p:nvCxnSpPr>
         <p:spPr>
           <a:xfrm flipV="1">
-            <a:off x="3156480" y="1570320"/>
-            <a:ext cx="1000080" cy="17280"/>
+            <a:off x="3177720" y="1373400"/>
+            <a:ext cx="979200" cy="4680"/>
           </a:xfrm>
           <a:prstGeom prst="curvedConnector3">
             <a:avLst>
-              <a:gd name="adj1" fmla="val 25027"/>
+              <a:gd name="adj1" fmla="val 25045"/>
             </a:avLst>
           </a:prstGeom>
           <a:ln w="36720">
@@ -2704,8 +2709,8 @@
         </p:nvSpPr>
         <p:spPr>
           <a:xfrm>
-            <a:off x="3010320" y="1179000"/>
-            <a:ext cx="1108080" cy="263880"/>
+            <a:off x="3010320" y="963000"/>
+            <a:ext cx="1107720" cy="263520"/>
           </a:xfrm>
           <a:prstGeom prst="rect">
             <a:avLst/>
@@ -2764,8 +2769,8 @@
         </p:nvCxnSpPr>
         <p:spPr>
           <a:xfrm flipV="1">
-            <a:off x="834120" y="3246840"/>
-            <a:ext cx="705240" cy="9360"/>
+            <a:off x="834120" y="3246480"/>
+            <a:ext cx="705240" cy="10080"/>
           </a:xfrm>
           <a:prstGeom prst="curvedConnector3">
             <a:avLst>
@@ -2790,12 +2795,12 @@
         </p:nvCxnSpPr>
         <p:spPr>
           <a:xfrm flipH="1" rot="16200000">
-            <a:off x="4416840" y="3273840"/>
-            <a:ext cx="2126520" cy="30240"/>
+            <a:off x="4416840" y="3273480"/>
+            <a:ext cx="2126880" cy="30600"/>
           </a:xfrm>
           <a:prstGeom prst="curvedConnector3">
             <a:avLst>
-              <a:gd name="adj1" fmla="val 25008"/>
+              <a:gd name="adj1" fmla="val 25021"/>
             </a:avLst>
           </a:prstGeom>
           <a:ln w="36720">
@@ -2817,7 +2822,7 @@
         <p:spPr>
           <a:xfrm>
             <a:off x="5389200" y="2286000"/>
-            <a:ext cx="829080" cy="274680"/>
+            <a:ext cx="828720" cy="274320"/>
           </a:xfrm>
           <a:prstGeom prst="rect">
             <a:avLst/>
@@ -2873,7 +2878,7 @@
         <p:spPr>
           <a:xfrm>
             <a:off x="4114800" y="3246840"/>
-            <a:ext cx="1371600" cy="456840"/>
+            <a:ext cx="1371240" cy="456480"/>
           </a:xfrm>
           <a:prstGeom prst="rect">
             <a:avLst/>
@@ -2925,13 +2930,13 @@
       <p:sp>
         <p:nvSpPr>
           <p:cNvPr id="45" name=""/>
-          <p:cNvSpPr txBox="1"/>
+          <p:cNvSpPr/>
           <p:nvPr/>
         </p:nvSpPr>
         <p:spPr>
           <a:xfrm>
             <a:off x="504360" y="71640"/>
-            <a:ext cx="9070920" cy="625320"/>
+            <a:ext cx="9070560" cy="624960"/>
           </a:xfrm>
           <a:prstGeom prst="rect">
             <a:avLst/>
@@ -2941,12 +2946,22 @@
             <a:noFill/>
           </a:ln>
         </p:spPr>
+        <p:style>
+          <a:lnRef idx="0"/>
+          <a:fillRef idx="0"/>
+          <a:effectRef idx="0"/>
+          <a:fontRef idx="minor"/>
+        </p:style>
         <p:txBody>
           <a:bodyPr lIns="0" rIns="0" tIns="0" bIns="0" anchor="ctr">
             <a:noAutofit/>
           </a:bodyPr>
           <a:p>
-            <a:pPr algn="ctr"/>
+            <a:pPr algn="ctr">
+              <a:lnSpc>
+                <a:spcPct val="100000"/>
+              </a:lnSpc>
+            </a:pPr>
             <a:r>
               <a:rPr b="0" lang="en-US" sz="4400" spc="-1" strike="noStrike">
                 <a:solidFill>
@@ -2967,14 +2982,14 @@
       </p:sp>
       <p:sp>
         <p:nvSpPr>
-          <p:cNvPr id="39" name=""/>
+          <p:cNvPr id="34" name=""/>
           <p:cNvSpPr/>
           <p:nvPr/>
         </p:nvSpPr>
         <p:spPr>
           <a:xfrm>
             <a:off x="4156200" y="999000"/>
-            <a:ext cx="1599480" cy="1143000"/>
+            <a:ext cx="1599120" cy="1142640"/>
           </a:xfrm>
           <a:prstGeom prst="roundRect">
             <a:avLst>
@@ -3093,8 +3108,8 @@
         </p:nvCxnSpPr>
         <p:spPr>
           <a:xfrm flipV="1">
-            <a:off x="2338560" y="2044080"/>
-            <a:ext cx="18360" cy="746280"/>
+            <a:off x="2338560" y="2043720"/>
+            <a:ext cx="18360" cy="746640"/>
           </a:xfrm>
           <a:prstGeom prst="straightConnector1">
             <a:avLst/>
@@ -3117,7 +3132,7 @@
         <p:spPr>
           <a:xfrm>
             <a:off x="1359000" y="2191320"/>
-            <a:ext cx="1286280" cy="479880"/>
+            <a:ext cx="1285920" cy="479520"/>
           </a:xfrm>
           <a:prstGeom prst="rect">
             <a:avLst/>
@@ -3175,7 +3190,7 @@
         <p:spPr>
           <a:xfrm>
             <a:off x="2995200" y="1662120"/>
-            <a:ext cx="1286280" cy="479880"/>
+            <a:ext cx="1285920" cy="479520"/>
           </a:xfrm>
           <a:prstGeom prst="rect">
             <a:avLst/>
@@ -3213,7 +3228,7 @@
                 <a:latin typeface="Arial"/>
                 <a:ea typeface="DejaVu Sans"/>
               </a:rPr>
-              <a:t>Close  Intake!</a:t>
+              <a:t>Open/close  Intake!</a:t>
             </a:r>
             <a:endParaRPr b="0" lang="en-US" sz="1500" spc="-1" strike="noStrike">
               <a:solidFill>
@@ -3232,12 +3247,12 @@
         </p:nvCxnSpPr>
         <p:spPr>
           <a:xfrm flipH="1" rot="16200000">
-            <a:off x="2584440" y="2557440"/>
-            <a:ext cx="2330280" cy="1280520"/>
+            <a:off x="2512440" y="2557080"/>
+            <a:ext cx="2330640" cy="1280880"/>
           </a:xfrm>
           <a:prstGeom prst="curvedConnector3">
             <a:avLst>
-              <a:gd name="adj1" fmla="val 25000"/>
+              <a:gd name="adj1" fmla="val 25011"/>
             </a:avLst>
           </a:prstGeom>
           <a:ln w="36720">
@@ -3259,7 +3274,7 @@
         <p:spPr>
           <a:xfrm>
             <a:off x="3085200" y="2430000"/>
-            <a:ext cx="829080" cy="274680"/>
+            <a:ext cx="828720" cy="274320"/>
           </a:xfrm>
           <a:prstGeom prst="rect">
             <a:avLst/>
@@ -3315,7 +3330,7 @@
         <p:spPr>
           <a:xfrm>
             <a:off x="5715000" y="1323360"/>
-            <a:ext cx="1371600" cy="456840"/>
+            <a:ext cx="1371240" cy="456480"/>
           </a:xfrm>
           <a:prstGeom prst="rect">
             <a:avLst/>
@@ -3374,6 +3389,32 @@
           </a:p>
         </p:txBody>
       </p:sp>
+      <p:cxnSp>
+        <p:nvCxnSpPr>
+          <p:cNvPr id="52" name=""/>
+          <p:cNvCxnSpPr/>
+          <p:nvPr/>
+        </p:nvCxnSpPr>
+        <p:spPr>
+          <a:xfrm flipV="1">
+            <a:off x="3168720" y="1659600"/>
+            <a:ext cx="979200" cy="4680"/>
+          </a:xfrm>
+          <a:prstGeom prst="curvedConnector3">
+            <a:avLst>
+              <a:gd name="adj1" fmla="val 25045"/>
+            </a:avLst>
+          </a:prstGeom>
+          <a:ln w="36720">
+            <a:solidFill>
+              <a:srgbClr val="3465a4"/>
+            </a:solidFill>
+            <a:round/>
+            <a:headEnd len="med" type="triangle" w="med"/>
+            <a:tailEnd len="med" type="triangle" w="med"/>
+          </a:ln>
+        </p:spPr>
+      </p:cxnSp>
     </p:spTree>
   </p:cSld>
   <mc:AlternateContent>
